--- a/decks/triple-electromagnetism/triple-electromagnetism_ch5_generator-effect.pptx
+++ b/decks/triple-electromagnetism/triple-electromagnetism_ch5_generator-effect.pptx
@@ -127,30 +127,30 @@
   <p:extLst>
     <p:ext uri="{521415D9-36F7-43E2-AB2F-B90AF26B5E84}">
       <p14:sectionLst xmlns:p14="http://schemas.microsoft.com/office/powerpoint/2010/main">
-        <p14:section name="Opening" id="{95c54af7-3121-8447-b2b1-a8cb8acd9203}">
+        <p14:section name="Opening" id="{5e1ebd08-74d4-9314-6202-d759fb8c57e5}">
           <p14:sldIdLst>
             <p14:sldId id="256"/>
           </p14:sldIdLst>
         </p14:section>
-        <p14:section name="Gate" id="{8e148878-0e12-2a79-f0dd-a59af9aadfa6}">
+        <p14:section name="Gate" id="{387b84a6-3320-b85a-1c7e-f6bd02d07c20}">
           <p14:sldIdLst>
             <p14:sldId id="257"/>
             <p14:sldId id="258"/>
           </p14:sldIdLst>
         </p14:section>
-        <p14:section name="Pre-teach" id="{888eb999-c78c-01df-1378-bd4447658d84}">
+        <p14:section name="Pre-teach" id="{363d4296-1183-b119-2ca1-68a4235761f4}">
           <p14:sldIdLst>
             <p14:sldId id="259"/>
             <p14:sldId id="260"/>
           </p14:sldIdLst>
         </p14:section>
-        <p14:section name="Read-along" id="{b791403b-126e-7b7c-64e9-c88e0c0041f7}">
+        <p14:section name="Read-along" id="{2da98ea6-08eb-c890-0408-5ef81016eada}">
           <p14:sldIdLst>
             <p14:sldId id="261"/>
             <p14:sldId id="262"/>
           </p14:sldIdLst>
         </p14:section>
-        <p14:section name="Teach" id="{f8c01330-3e5c-665e-41f8-72010a0f3b21}">
+        <p14:section name="Teach" id="{352d7a64-2e03-ae4c-81a5-af6c9a6c11ca}">
           <p14:sldIdLst>
             <p14:sldId id="263"/>
             <p14:sldId id="264"/>
@@ -160,7 +160,7 @@
             <p14:sldId id="268"/>
           </p14:sldIdLst>
         </p14:section>
-        <p14:section name="Routes" id="{0b365dcd-fc3d-4f8a-61bc-c54ec50adca1}">
+        <p14:section name="Routes" id="{76c3220a-680b-aa44-e611-3c67c3b05bf6}">
           <p14:sldIdLst>
             <p14:sldId id="269"/>
             <p14:sldId id="270"/>
@@ -168,12 +168,12 @@
             <p14:sldId id="272"/>
           </p14:sldIdLst>
         </p14:section>
-        <p14:section name="Close" id="{a3b539bc-eedf-3db0-4846-a658f644133b}">
+        <p14:section name="Close" id="{9271a3e2-29e6-0f96-321a-01dad0bcb19c}">
           <p14:sldIdLst>
             <p14:sldId id="273"/>
           </p14:sldIdLst>
         </p14:section>
-        <p14:section name="Answers" id="{caa6f27d-77ed-edc2-2162-d881633e99bf}">
+        <p14:section name="Answers" id="{9c972cef-ff49-860b-4cef-c1ceb7ecdfcb}">
           <p14:sldIdLst>
             <p14:sldId id="274"/>
             <p14:sldId id="275"/>
@@ -1420,7 +1420,7 @@
               <a:rPr lang="en-US" dirty="0"/>
               <a:t>Exit ticket — individual, silent, on a slip or mini-whiteboard. Recall before help: no notes, no lanes, no hints. Collect before pupils leave.
 Question: A wire is moved through a magnetic field. What is induced across the ends of the wire?
-Answer: D   A potential difference. Relative motion between a conductor and a magnetic field induces a potential difference. A current flows only if there is a complete circuit.
+Answer: B   A potential difference. Relative motion between a conductor and a magnetic field induces a potential difference. A current flows only if there is a complete circuit.
 Source of this question: gate item 1 re-asked (options rotated) — this chapter has no third quick-check module.
 The ebook also holds task 3, "Describe the alternator's output (6 marks)", for homework or the next lesson's do now.
 Sort the slips: correct → ready to move on; incorrect → start next lesson in the pre-teach group, with the read-along and the Support lane. Same destination next time.</a:t>
@@ -1512,7 +1512,7 @@
             <a:r>
               <a:rPr lang="en-US" dirty="0"/>
               <a:t>Answers — task 1: Make the reading bigger. Reveal the answer; pupils mark their own work in a different colour, then read the "why" together. Same destination for every lane, so one answer serves the whole class.
-Answer: A   Moving the coil faster
+Answer: D   Moving the coil faster
 Why: Faster movement cuts the field lines more quickly, so the induced p.d. is bigger. A stronger field or more turns would also increase it; no motion gives nothing; fewer turns gives less.
 Ask a Support pupil to explain one step, and a Stretch pupil to share their extension.</a:t>
             </a:r>
@@ -1603,9 +1603,9 @@
             <a:r>
               <a:rPr lang="en-US" dirty="0"/>
               <a:t>Do now — retrieval. Silent, no notes, no help: recall comes before any support. Give about four minutes.
-1. A wire is moved through a magnetic field. What is induced across the ends of the wire?  →  A   A potential difference
+1. A wire is moved through a magnetic field. What is induced across the ends of the wire?  →  C   A potential difference
 2. The magnetic field produced by an induced current always ___ the change that caused it.  →  opposes
-3. Why does an alternator produce an alternating current?  →  A   Each side of the coil moves down through the field, then up, so the induced p.d. keeps reversing
+3. Why does an alternator produce an alternating current?  →  D   Each side of the coil moves down through the field, then up, so the induced p.d. keeps reversing
 Circulate: who gets 3/3 (Stretch route), 2/3 (Core), 0–1 (Support)? Use this to route pupils later in the lesson.</a:t>
             </a:r>
             <a:endParaRPr lang="en-US" dirty="0"/>
@@ -1786,7 +1786,7 @@
             <a:r>
               <a:rPr lang="en-US" dirty="0"/>
               <a:t>Answers — exit ticket: Exit ticket. Reveal the answer; pupils mark their own work in a different colour, then read the "why" together. Same destination for every lane, so one answer serves the whole class.
-Answer: D   A potential difference
+Answer: B   A potential difference
 Why: Relative motion between a conductor and a magnetic field induces a potential difference. A current flows only if there is a complete circuit.
 Ask a Support pupil to explain one step, and a Stretch pupil to share their extension.</a:t>
             </a:r>
@@ -1877,9 +1877,9 @@
             <a:r>
               <a:rPr lang="en-US" dirty="0"/>
               <a:t>Answers — pupils mark their own in a different colour, then hands up for 3/3, 2/3, 1/3.
-1. A   A potential difference. Relative motion between a conductor and a magnetic field induces a potential difference. A current flows only if there is a complete circuit.
+1. C   A potential difference. Relative motion between a conductor and a magnetic field induces a potential difference. A current flows only if there is a complete circuit.
 2. opposes. This is why a coil pushes back on a magnet being pushed into it, and why generators are hard to turn.
-3. A   Each side of the coil moves down through the field, then up, so the induced p.d. keeps reversing. The direction of the induced p.d. depends on the direction of motion through the field, and each side of the spinning coil reverses its motion every half turn.
+3. D   Each side of the coil moves down through the field, then up, so the induced p.d. keeps reversing. The direction of the induced p.d. depends on the direction of motion through the field, and each side of the spinning coil reverses its motion every half turn.
 Say the route each score points to: 3/3 Stretch, 2/3 Core, 0–1 Support. Pupils may choose to move up.</a:t>
             </a:r>
             <a:endParaRPr lang="en-US" dirty="0"/>
@@ -6741,7 +6741,7 @@
                 <a:ea typeface="Calibri" pitchFamily="34" charset="-122"/>
                 <a:cs typeface="Calibri" pitchFamily="34" charset="-120"/>
               </a:rPr>
-              <a:t>Moving the coil faster</a:t>
+              <a:t>Using thicker insulation on the wire</a:t>
             </a:r>
             <a:endParaRPr lang="en-US" sz="2600" dirty="0"/>
           </a:p>
@@ -6778,7 +6778,7 @@
                 <a:ea typeface="Calibri" pitchFamily="34" charset="-122"/>
                 <a:cs typeface="Calibri" pitchFamily="34" charset="-120"/>
               </a:rPr>
-              <a:t>Using thicker insulation on the wire</a:t>
+              <a:t>Using fewer turns of wire</a:t>
             </a:r>
             <a:endParaRPr lang="en-US" sz="2600" dirty="0"/>
           </a:p>
@@ -6852,7 +6852,7 @@
                 <a:ea typeface="Calibri" pitchFamily="34" charset="-122"/>
                 <a:cs typeface="Calibri" pitchFamily="34" charset="-120"/>
               </a:rPr>
-              <a:t>Using fewer turns of wire</a:t>
+              <a:t>Moving the coil faster</a:t>
             </a:r>
             <a:endParaRPr lang="en-US" sz="2600" dirty="0"/>
           </a:p>
@@ -10816,7 +10816,7 @@
                 <a:ea typeface="Calibri" pitchFamily="34" charset="-122"/>
                 <a:cs typeface="Calibri" pitchFamily="34" charset="-120"/>
               </a:rPr>
-              <a:t>A magnetic pole</a:t>
+              <a:t>A charge of exactly 1 coulomb</a:t>
             </a:r>
             <a:endParaRPr lang="en-US" sz="2400" dirty="0"/>
           </a:p>
@@ -10853,7 +10853,7 @@
                 <a:ea typeface="Calibri" pitchFamily="34" charset="-122"/>
                 <a:cs typeface="Calibri" pitchFamily="34" charset="-120"/>
               </a:rPr>
-              <a:t>A resistance</a:t>
+              <a:t>A potential difference</a:t>
             </a:r>
             <a:endParaRPr lang="en-US" sz="2400" dirty="0"/>
           </a:p>
@@ -10890,7 +10890,7 @@
                 <a:ea typeface="Calibri" pitchFamily="34" charset="-122"/>
                 <a:cs typeface="Calibri" pitchFamily="34" charset="-120"/>
               </a:rPr>
-              <a:t>A charge of exactly 1 coulomb</a:t>
+              <a:t>A magnetic pole</a:t>
             </a:r>
             <a:endParaRPr lang="en-US" sz="2400" dirty="0"/>
           </a:p>
@@ -10927,7 +10927,7 @@
                 <a:ea typeface="Calibri" pitchFamily="34" charset="-122"/>
                 <a:cs typeface="Calibri" pitchFamily="34" charset="-120"/>
               </a:rPr>
-              <a:t>A potential difference</a:t>
+              <a:t>A resistance</a:t>
             </a:r>
             <a:endParaRPr lang="en-US" sz="2400" dirty="0"/>
           </a:p>
@@ -11332,7 +11332,7 @@
                 <a:ea typeface="Cambria" pitchFamily="34" charset="-122"/>
                 <a:cs typeface="Cambria" pitchFamily="34" charset="-120"/>
               </a:rPr>
-              <a:t>A   Moving the coil faster</a:t>
+              <a:t>D   Moving the coil faster</a:t>
             </a:r>
             <a:endParaRPr lang="en-US" sz="1800" dirty="0"/>
           </a:p>
@@ -11866,7 +11866,7 @@
                 <a:ea typeface="Calibri" pitchFamily="34" charset="-122"/>
                 <a:cs typeface="Calibri" pitchFamily="34" charset="-120"/>
               </a:rPr>
-              <a:t>A potential difference</a:t>
+              <a:t>A resistance</a:t>
             </a:r>
             <a:endParaRPr lang="en-US" sz="2200" dirty="0"/>
           </a:p>
@@ -11903,7 +11903,7 @@
                 <a:ea typeface="Calibri" pitchFamily="34" charset="-122"/>
                 <a:cs typeface="Calibri" pitchFamily="34" charset="-120"/>
               </a:rPr>
-              <a:t>A magnetic pole</a:t>
+              <a:t>A charge of exactly 1 coulomb</a:t>
             </a:r>
             <a:endParaRPr lang="en-US" sz="2200" dirty="0"/>
           </a:p>
@@ -11940,7 +11940,7 @@
                 <a:ea typeface="Calibri" pitchFamily="34" charset="-122"/>
                 <a:cs typeface="Calibri" pitchFamily="34" charset="-120"/>
               </a:rPr>
-              <a:t>A resistance</a:t>
+              <a:t>A potential difference</a:t>
             </a:r>
             <a:endParaRPr lang="en-US" sz="2200" dirty="0"/>
           </a:p>
@@ -11977,7 +11977,7 @@
                 <a:ea typeface="Calibri" pitchFamily="34" charset="-122"/>
                 <a:cs typeface="Calibri" pitchFamily="34" charset="-120"/>
               </a:rPr>
-              <a:t>A charge of exactly 1 coulomb</a:t>
+              <a:t>A magnetic pole</a:t>
             </a:r>
             <a:endParaRPr lang="en-US" sz="2200" dirty="0"/>
           </a:p>
@@ -12379,7 +12379,7 @@
                 <a:ea typeface="Calibri" pitchFamily="34" charset="-122"/>
                 <a:cs typeface="Calibri" pitchFamily="34" charset="-120"/>
               </a:rPr>
-              <a:t>Each side of the coil moves down through the field, then up, so the induced p.d. keeps reversing</a:t>
+              <a:t>Its slip rings swap the connections every half turn</a:t>
             </a:r>
             <a:endParaRPr lang="en-US" sz="1800" dirty="0"/>
           </a:p>
@@ -12416,7 +12416,7 @@
                 <a:ea typeface="Calibri" pitchFamily="34" charset="-122"/>
                 <a:cs typeface="Calibri" pitchFamily="34" charset="-120"/>
               </a:rPr>
-              <a:t>Its slip rings swap the connections every half turn</a:t>
+              <a:t>The coil is made of two different metals</a:t>
             </a:r>
             <a:endParaRPr lang="en-US" sz="1800" dirty="0"/>
           </a:p>
@@ -12490,7 +12490,7 @@
                 <a:ea typeface="Calibri" pitchFamily="34" charset="-122"/>
                 <a:cs typeface="Calibri" pitchFamily="34" charset="-120"/>
               </a:rPr>
-              <a:t>The coil is made of two different metals</a:t>
+              <a:t>Each side of the coil moves down through the field, then up, so the induced p.d. keeps reversing</a:t>
             </a:r>
             <a:endParaRPr lang="en-US" sz="1800" dirty="0"/>
           </a:p>
@@ -13436,7 +13436,7 @@
                 <a:ea typeface="Cambria" pitchFamily="34" charset="-122"/>
                 <a:cs typeface="Cambria" pitchFamily="34" charset="-120"/>
               </a:rPr>
-              <a:t>D   A potential difference</a:t>
+              <a:t>B   A potential difference</a:t>
             </a:r>
             <a:endParaRPr lang="en-US" sz="1800" dirty="0"/>
           </a:p>
@@ -13957,7 +13957,7 @@
                 <a:ea typeface="Calibri" pitchFamily="34" charset="-122"/>
                 <a:cs typeface="Calibri" pitchFamily="34" charset="-120"/>
               </a:rPr>
-              <a:t>A   A potential difference</a:t>
+              <a:t>C   A potential difference</a:t>
             </a:r>
             <a:endParaRPr lang="en-US" sz="2200" dirty="0"/>
           </a:p>
@@ -14437,7 +14437,7 @@
                 <a:ea typeface="Calibri" pitchFamily="34" charset="-122"/>
                 <a:cs typeface="Calibri" pitchFamily="34" charset="-120"/>
               </a:rPr>
-              <a:t>A   Each side of the coil moves down through the field, then up, so the induced p.d. keeps reversing</a:t>
+              <a:t>D   Each side of the coil moves down through the field, then up, so the induced p.d. keeps reversing</a:t>
             </a:r>
             <a:endParaRPr lang="en-US" sz="2200" dirty="0"/>
           </a:p>

--- a/decks/triple-electromagnetism/triple-electromagnetism_ch5_generator-effect.pptx
+++ b/decks/triple-electromagnetism/triple-electromagnetism_ch5_generator-effect.pptx
@@ -127,30 +127,30 @@
   <p:extLst>
     <p:ext uri="{521415D9-36F7-43E2-AB2F-B90AF26B5E84}">
       <p14:sectionLst xmlns:p14="http://schemas.microsoft.com/office/powerpoint/2010/main">
-        <p14:section name="Opening" id="{5e1ebd08-74d4-9314-6202-d759fb8c57e5}">
+        <p14:section name="Opening" id="{ba15cb60-729c-c62f-62d9-6938dbcefa77}">
           <p14:sldIdLst>
             <p14:sldId id="256"/>
           </p14:sldIdLst>
         </p14:section>
-        <p14:section name="Gate" id="{387b84a6-3320-b85a-1c7e-f6bd02d07c20}">
+        <p14:section name="Gate" id="{3f0ef433-98c9-d661-533e-9d30bd77aff4}">
           <p14:sldIdLst>
             <p14:sldId id="257"/>
             <p14:sldId id="258"/>
           </p14:sldIdLst>
         </p14:section>
-        <p14:section name="Pre-teach" id="{363d4296-1183-b119-2ca1-68a4235761f4}">
+        <p14:section name="Pre-teach" id="{e346d667-265f-0394-136a-f1ed41e44739}">
           <p14:sldIdLst>
             <p14:sldId id="259"/>
             <p14:sldId id="260"/>
           </p14:sldIdLst>
         </p14:section>
-        <p14:section name="Read-along" id="{2da98ea6-08eb-c890-0408-5ef81016eada}">
+        <p14:section name="Read-along" id="{3dd1bf7a-72f2-d1e8-5d42-f836d5d57658}">
           <p14:sldIdLst>
             <p14:sldId id="261"/>
             <p14:sldId id="262"/>
           </p14:sldIdLst>
         </p14:section>
-        <p14:section name="Teach" id="{352d7a64-2e03-ae4c-81a5-af6c9a6c11ca}">
+        <p14:section name="Teach" id="{e12c39f3-800c-8797-1e6f-b6e40c48e41b}">
           <p14:sldIdLst>
             <p14:sldId id="263"/>
             <p14:sldId id="264"/>
@@ -160,7 +160,7 @@
             <p14:sldId id="268"/>
           </p14:sldIdLst>
         </p14:section>
-        <p14:section name="Routes" id="{76c3220a-680b-aa44-e611-3c67c3b05bf6}">
+        <p14:section name="Routes" id="{9339c797-8eee-c6e2-6fba-f074c311e50c}">
           <p14:sldIdLst>
             <p14:sldId id="269"/>
             <p14:sldId id="270"/>
@@ -168,12 +168,12 @@
             <p14:sldId id="272"/>
           </p14:sldIdLst>
         </p14:section>
-        <p14:section name="Close" id="{9271a3e2-29e6-0f96-321a-01dad0bcb19c}">
+        <p14:section name="Close" id="{a3a290d6-55b2-be20-ae6f-f80a6af2cc5f}">
           <p14:sldIdLst>
             <p14:sldId id="273"/>
           </p14:sldIdLst>
         </p14:section>
-        <p14:section name="Answers" id="{9c972cef-ff49-860b-4cef-c1ceb7ecdfcb}">
+        <p14:section name="Answers" id="{f1fc231f-99df-8b5e-2286-da7d1e83bc25}">
           <p14:sldIdLst>
             <p14:sldId id="274"/>
             <p14:sldId id="275"/>
